--- a/p05/Defining-a-frame-components.pptx
+++ b/p05/Defining-a-frame-components.pptx
@@ -208,7 +208,7 @@
           <a:p>
             <a:fld id="{0CC22E7C-05FA-4B07-9A3E-26967016A603}" type="datetimeFigureOut">
               <a:rPr lang="en-US" smtClean="0"/>
-              <a:t>5/30/2025</a:t>
+              <a:t>1/6/2026</a:t>
             </a:fld>
             <a:endParaRPr lang="en-US"/>
           </a:p>
@@ -606,7 +606,7 @@
           <a:p>
             <a:fld id="{846CE7D5-CF57-46EF-B807-FDD0502418D4}" type="datetimeFigureOut">
               <a:rPr lang="en-US" smtClean="0"/>
-              <a:t>5/30/2025</a:t>
+              <a:t>1/6/2026</a:t>
             </a:fld>
             <a:endParaRPr lang="en-US"/>
           </a:p>
@@ -776,7 +776,7 @@
           <a:p>
             <a:fld id="{846CE7D5-CF57-46EF-B807-FDD0502418D4}" type="datetimeFigureOut">
               <a:rPr lang="en-US" smtClean="0"/>
-              <a:t>5/30/2025</a:t>
+              <a:t>1/6/2026</a:t>
             </a:fld>
             <a:endParaRPr lang="en-US"/>
           </a:p>
@@ -956,7 +956,7 @@
           <a:p>
             <a:fld id="{846CE7D5-CF57-46EF-B807-FDD0502418D4}" type="datetimeFigureOut">
               <a:rPr lang="en-US" smtClean="0"/>
-              <a:t>5/30/2025</a:t>
+              <a:t>1/6/2026</a:t>
             </a:fld>
             <a:endParaRPr lang="en-US"/>
           </a:p>
@@ -1126,7 +1126,7 @@
           <a:p>
             <a:fld id="{846CE7D5-CF57-46EF-B807-FDD0502418D4}" type="datetimeFigureOut">
               <a:rPr lang="en-US" smtClean="0"/>
-              <a:t>5/30/2025</a:t>
+              <a:t>1/6/2026</a:t>
             </a:fld>
             <a:endParaRPr lang="en-US"/>
           </a:p>
@@ -1372,7 +1372,7 @@
           <a:p>
             <a:fld id="{846CE7D5-CF57-46EF-B807-FDD0502418D4}" type="datetimeFigureOut">
               <a:rPr lang="en-US" smtClean="0"/>
-              <a:t>5/30/2025</a:t>
+              <a:t>1/6/2026</a:t>
             </a:fld>
             <a:endParaRPr lang="en-US"/>
           </a:p>
@@ -1604,7 +1604,7 @@
           <a:p>
             <a:fld id="{846CE7D5-CF57-46EF-B807-FDD0502418D4}" type="datetimeFigureOut">
               <a:rPr lang="en-US" smtClean="0"/>
-              <a:t>5/30/2025</a:t>
+              <a:t>1/6/2026</a:t>
             </a:fld>
             <a:endParaRPr lang="en-US"/>
           </a:p>
@@ -1971,7 +1971,7 @@
           <a:p>
             <a:fld id="{846CE7D5-CF57-46EF-B807-FDD0502418D4}" type="datetimeFigureOut">
               <a:rPr lang="en-US" smtClean="0"/>
-              <a:t>5/30/2025</a:t>
+              <a:t>1/6/2026</a:t>
             </a:fld>
             <a:endParaRPr lang="en-US"/>
           </a:p>
@@ -2089,7 +2089,7 @@
           <a:p>
             <a:fld id="{846CE7D5-CF57-46EF-B807-FDD0502418D4}" type="datetimeFigureOut">
               <a:rPr lang="en-US" smtClean="0"/>
-              <a:t>5/30/2025</a:t>
+              <a:t>1/6/2026</a:t>
             </a:fld>
             <a:endParaRPr lang="en-US"/>
           </a:p>
@@ -2184,7 +2184,7 @@
           <a:p>
             <a:fld id="{846CE7D5-CF57-46EF-B807-FDD0502418D4}" type="datetimeFigureOut">
               <a:rPr lang="en-US" smtClean="0"/>
-              <a:t>5/30/2025</a:t>
+              <a:t>1/6/2026</a:t>
             </a:fld>
             <a:endParaRPr lang="en-US"/>
           </a:p>
@@ -2461,7 +2461,7 @@
           <a:p>
             <a:fld id="{846CE7D5-CF57-46EF-B807-FDD0502418D4}" type="datetimeFigureOut">
               <a:rPr lang="en-US" smtClean="0"/>
-              <a:t>5/30/2025</a:t>
+              <a:t>1/6/2026</a:t>
             </a:fld>
             <a:endParaRPr lang="en-US"/>
           </a:p>
@@ -2718,7 +2718,7 @@
           <a:p>
             <a:fld id="{846CE7D5-CF57-46EF-B807-FDD0502418D4}" type="datetimeFigureOut">
               <a:rPr lang="en-US" smtClean="0"/>
-              <a:t>5/30/2025</a:t>
+              <a:t>1/6/2026</a:t>
             </a:fld>
             <a:endParaRPr lang="en-US"/>
           </a:p>
@@ -2931,7 +2931,7 @@
           <a:p>
             <a:fld id="{846CE7D5-CF57-46EF-B807-FDD0502418D4}" type="datetimeFigureOut">
               <a:rPr lang="en-US" smtClean="0"/>
-              <a:t>5/30/2025</a:t>
+              <a:t>1/6/2026</a:t>
             </a:fld>
             <a:endParaRPr lang="en-US"/>
           </a:p>
@@ -4719,23 +4719,7 @@
             </a:pPr>
             <a:r>
               <a:rPr lang="en-US" dirty="0"/>
-              <a:t>		let </a:t>
-            </a:r>
-            <a:r>
-              <a:rPr lang="en-US" dirty="0" err="1"/>
-              <a:t>el</a:t>
-            </a:r>
-            <a:r>
-              <a:rPr lang="en-US" dirty="0"/>
-              <a:t> = </a:t>
-            </a:r>
-            <a:r>
-              <a:rPr lang="en-US" dirty="0" err="1"/>
-              <a:t>this.el</a:t>
-            </a:r>
-            <a:r>
-              <a:rPr lang="en-US" dirty="0"/>
-              <a:t>;</a:t>
+              <a:t>		let e1 = this.e1;</a:t>
             </a:r>
           </a:p>
           <a:p>
@@ -4761,15 +4745,7 @@
             </a:pPr>
             <a:r>
               <a:rPr lang="en-US" dirty="0"/>
-              <a:t>		</a:t>
-            </a:r>
-            <a:r>
-              <a:rPr lang="en-US" dirty="0" err="1"/>
-              <a:t>el.setAttribute</a:t>
-            </a:r>
-            <a:r>
-              <a:rPr lang="en-US" dirty="0"/>
-              <a:t>('</a:t>
+              <a:t>			e1.setAttribute('</a:t>
             </a:r>
             <a:r>
               <a:rPr lang="en-US" dirty="0" err="1"/>
